--- a/SG_Guard_Final_Review.pptx
+++ b/SG_Guard_Final_Review.pptx
@@ -2164,7 +2164,7 @@
                 <a:ea typeface="Calibri" pitchFamily="34" charset="-122"/>
                 <a:cs typeface="Calibri" pitchFamily="34" charset="-120"/>
               </a:rPr>
-              <a:t>Carwyn Yeo  ·  Lam Yan Yee</a:t>
+              <a:t>Carwyn Yeo</a:t>
             </a:r>
             <a:endParaRPr lang="en-US" sz="1300" dirty="0"/>
           </a:p>
